--- a/presentation/SH-FMS_프로젝트보고.pptx
+++ b/presentation/SH-FMS_프로젝트보고.pptx
@@ -3408,7 +3408,7 @@
                 </a:solidFill>
                 <a:latin typeface="맑은 고딕"/>
               </a:rPr>
-              <a:t>통합 모니터링 시스템 구축 과제 보고</a:t>
+              <a:t>개인 프로젝트 · 공장 통합 관제 시스템 설계 및 구현</a:t>
             </a:r>
           </a:p>
           <a:p>
@@ -3463,7 +3463,7 @@
                 </a:solidFill>
                 <a:latin typeface="맑은 고딕"/>
               </a:rPr>
-              <a:t>과제기간</a:t>
+              <a:t>프로젝트</a:t>
             </a:r>
           </a:p>
         </p:txBody>
@@ -3502,7 +3502,7 @@
                 </a:solidFill>
                 <a:latin typeface="맑은 고딕"/>
               </a:rPr>
-              <a:t>2026-07-10 ~ 11-15</a:t>
+              <a:t>프로젝트SH</a:t>
             </a:r>
           </a:p>
         </p:txBody>
@@ -3541,7 +3541,7 @@
                 </a:solidFill>
                 <a:latin typeface="맑은 고딕"/>
               </a:rPr>
-              <a:t>발주</a:t>
+              <a:t>구분</a:t>
             </a:r>
           </a:p>
         </p:txBody>
@@ -3580,7 +3580,7 @@
                 </a:solidFill>
                 <a:latin typeface="맑은 고딕"/>
               </a:rPr>
-              <a:t>생산본부 / 안전보건팀</a:t>
+              <a:t>개인 프로젝트</a:t>
             </a:r>
           </a:p>
         </p:txBody>
@@ -3619,7 +3619,7 @@
                 </a:solidFill>
                 <a:latin typeface="맑은 고딕"/>
               </a:rPr>
-              <a:t>수행</a:t>
+              <a:t>만든 사람</a:t>
             </a:r>
           </a:p>
         </p:txBody>
@@ -3658,7 +3658,7 @@
                 </a:solidFill>
                 <a:latin typeface="맑은 고딕"/>
               </a:rPr>
-              <a:t>제어기술팀</a:t>
+              <a:t>남성흠</a:t>
             </a:r>
           </a:p>
         </p:txBody>
@@ -3697,7 +3697,7 @@
                 </a:solidFill>
                 <a:latin typeface="맑은 고딕"/>
               </a:rPr>
-              <a:t>진척</a:t>
+              <a:t>기간</a:t>
             </a:r>
           </a:p>
         </p:txBody>
@@ -3736,7 +3736,7 @@
                 </a:solidFill>
                 <a:latin typeface="맑은 고딕"/>
               </a:rPr>
-              <a:t>78%</a:t>
+              <a:t>2026-07-10 ~ 11-15</a:t>
             </a:r>
           </a:p>
         </p:txBody>
@@ -3775,7 +3775,7 @@
                 </a:solidFill>
                 <a:latin typeface="맑은 고딕"/>
               </a:rPr>
-              <a:t>보고일</a:t>
+              <a:t>진척</a:t>
             </a:r>
           </a:p>
         </p:txBody>
@@ -3814,7 +3814,7 @@
                 </a:solidFill>
                 <a:latin typeface="맑은 고딕"/>
               </a:rPr>
-              <a:t>2026-09-21</a:t>
+              <a:t>78%</a:t>
             </a:r>
           </a:p>
         </p:txBody>
@@ -11921,7 +11921,7 @@
                 </a:solidFill>
                 <a:latin typeface="맑은 고딕"/>
               </a:rPr>
-              <a:t>· 운전원 교육 (조별 2회)</a:t>
+              <a:t>· 운전원 관점 사용성 점검</a:t>
             </a:r>
           </a:p>
           <a:p>
@@ -11953,7 +11953,7 @@
                 </a:solidFill>
                 <a:latin typeface="맑은 고딕"/>
               </a:rPr>
-              <a:t>· 기존 설비사 감시 화면 철거 일정 확정</a:t>
+              <a:t>· 기존 설비사 화면 대비 기능 커버리지 점검</a:t>
             </a:r>
           </a:p>
         </p:txBody>
@@ -12284,7 +12284,7 @@
         <p:spPr>
           <a:xfrm>
             <a:off x="749808" y="4485132"/>
-            <a:ext cx="5838444" cy="329184"/>
+            <a:ext cx="2247595" cy="329184"/>
           </a:xfrm>
           <a:prstGeom prst="rect">
             <a:avLst/>
@@ -12309,7 +12309,7 @@
                 </a:solidFill>
                 <a:latin typeface="맑은 고딕"/>
               </a:rPr>
-              <a:t>역할</a:t>
+              <a:t>구분</a:t>
             </a:r>
           </a:p>
         </p:txBody>
@@ -12322,8 +12322,8 @@
         </p:nvSpPr>
         <p:spPr>
           <a:xfrm>
-            <a:off x="6734556" y="4485132"/>
-            <a:ext cx="2574036" cy="329184"/>
+            <a:off x="3143707" y="4485132"/>
+            <a:ext cx="8341156" cy="329184"/>
           </a:xfrm>
           <a:prstGeom prst="rect">
             <a:avLst/>
@@ -12348,53 +12348,14 @@
                 </a:solidFill>
                 <a:latin typeface="맑은 고딕"/>
               </a:rPr>
-              <a:t>담당</a:t>
-            </a:r>
-          </a:p>
-        </p:txBody>
-      </p:sp>
-      <p:sp>
-        <p:nvSpPr>
-          <p:cNvPr id="20" name="TextBox 19"/>
-          <p:cNvSpPr txBox="1"/>
-          <p:nvPr/>
-        </p:nvSpPr>
-        <p:spPr>
-          <a:xfrm>
-            <a:off x="9454896" y="4485132"/>
-            <a:ext cx="2029968" cy="329184"/>
-          </a:xfrm>
-          <a:prstGeom prst="rect">
-            <a:avLst/>
-          </a:prstGeom>
-          <a:noFill/>
-        </p:spPr>
-        <p:txBody>
-          <a:bodyPr wrap="square" lIns="0" rIns="0" tIns="0" bIns="0" anchor="t">
-            <a:spAutoFit/>
-          </a:bodyPr>
-          <a:lstStyle/>
-          <a:p>
-            <a:pPr algn="l">
-              <a:spcAft>
-                <a:spcPts val="0"/>
-              </a:spcAft>
-            </a:pPr>
-            <a:r>
-              <a:rPr sz="1150" b="1">
-                <a:solidFill>
-                  <a:srgbClr val="78828F"/>
-                </a:solidFill>
-                <a:latin typeface="맑은 고딕"/>
-              </a:rPr>
-              <a:t>투입 M/M</a:t>
-            </a:r>
-          </a:p>
-        </p:txBody>
-      </p:sp>
-      <p:sp>
-        <p:nvSpPr>
-          <p:cNvPr id="21" name="Rectangle 20"/>
+              <a:t>내용</a:t>
+            </a:r>
+          </a:p>
+        </p:txBody>
+      </p:sp>
+      <p:sp>
+        <p:nvSpPr>
+          <p:cNvPr id="20" name="Rectangle 19"/>
           <p:cNvSpPr/>
           <p:nvPr/>
         </p:nvSpPr>
@@ -12438,14 +12399,53 @@
       </p:sp>
       <p:sp>
         <p:nvSpPr>
+          <p:cNvPr id="21" name="TextBox 20"/>
+          <p:cNvSpPr txBox="1"/>
+          <p:nvPr/>
+        </p:nvSpPr>
+        <p:spPr>
+          <a:xfrm>
+            <a:off x="749808" y="4814316"/>
+            <a:ext cx="2247595" cy="329184"/>
+          </a:xfrm>
+          <a:prstGeom prst="rect">
+            <a:avLst/>
+          </a:prstGeom>
+          <a:noFill/>
+        </p:spPr>
+        <p:txBody>
+          <a:bodyPr wrap="square" lIns="0" rIns="0" tIns="0" bIns="0" anchor="t">
+            <a:spAutoFit/>
+          </a:bodyPr>
+          <a:lstStyle/>
+          <a:p>
+            <a:pPr algn="l">
+              <a:spcAft>
+                <a:spcPts val="0"/>
+              </a:spcAft>
+            </a:pPr>
+            <a:r>
+              <a:rPr sz="1150" b="0">
+                <a:solidFill>
+                  <a:srgbClr val="D3D9E2"/>
+                </a:solidFill>
+                <a:latin typeface="맑은 고딕"/>
+              </a:rPr>
+              <a:t>관제 화면</a:t>
+            </a:r>
+          </a:p>
+        </p:txBody>
+      </p:sp>
+      <p:sp>
+        <p:nvSpPr>
           <p:cNvPr id="22" name="TextBox 21"/>
           <p:cNvSpPr txBox="1"/>
           <p:nvPr/>
         </p:nvSpPr>
         <p:spPr>
           <a:xfrm>
-            <a:off x="749808" y="4814316"/>
-            <a:ext cx="5838444" cy="329184"/>
+            <a:off x="3143707" y="4814316"/>
+            <a:ext cx="8341156" cy="329184"/>
           </a:xfrm>
           <a:prstGeom prst="rect">
             <a:avLst/>
@@ -12470,92 +12470,14 @@
                 </a:solidFill>
                 <a:latin typeface="맑은 고딕"/>
               </a:rPr>
-              <a:t>PM / 백엔드(C++·C#) / 알람엔진</a:t>
-            </a:r>
-          </a:p>
-        </p:txBody>
-      </p:sp>
-      <p:sp>
-        <p:nvSpPr>
-          <p:cNvPr id="23" name="TextBox 22"/>
-          <p:cNvSpPr txBox="1"/>
-          <p:nvPr/>
-        </p:nvSpPr>
-        <p:spPr>
-          <a:xfrm>
-            <a:off x="6734556" y="4814316"/>
-            <a:ext cx="2574036" cy="329184"/>
-          </a:xfrm>
-          <a:prstGeom prst="rect">
-            <a:avLst/>
-          </a:prstGeom>
-          <a:noFill/>
-        </p:spPr>
-        <p:txBody>
-          <a:bodyPr wrap="square" lIns="0" rIns="0" tIns="0" bIns="0" anchor="t">
-            <a:spAutoFit/>
-          </a:bodyPr>
-          <a:lstStyle/>
-          <a:p>
-            <a:pPr algn="l">
-              <a:spcAft>
-                <a:spcPts val="0"/>
-              </a:spcAft>
-            </a:pPr>
-            <a:r>
-              <a:rPr sz="1150" b="0">
-                <a:solidFill>
-                  <a:srgbClr val="D3D9E2"/>
-                </a:solidFill>
-                <a:latin typeface="맑은 고딕"/>
-              </a:rPr>
-              <a:t>김현우</a:t>
-            </a:r>
-          </a:p>
-        </p:txBody>
-      </p:sp>
-      <p:sp>
-        <p:nvSpPr>
-          <p:cNvPr id="24" name="TextBox 23"/>
-          <p:cNvSpPr txBox="1"/>
-          <p:nvPr/>
-        </p:nvSpPr>
-        <p:spPr>
-          <a:xfrm>
-            <a:off x="9454896" y="4814316"/>
-            <a:ext cx="2029968" cy="329184"/>
-          </a:xfrm>
-          <a:prstGeom prst="rect">
-            <a:avLst/>
-          </a:prstGeom>
-          <a:noFill/>
-        </p:spPr>
-        <p:txBody>
-          <a:bodyPr wrap="square" lIns="0" rIns="0" tIns="0" bIns="0" anchor="t">
-            <a:spAutoFit/>
-          </a:bodyPr>
-          <a:lstStyle/>
-          <a:p>
-            <a:pPr algn="l">
-              <a:spcAft>
-                <a:spcPts val="0"/>
-              </a:spcAft>
-            </a:pPr>
-            <a:r>
-              <a:rPr sz="1150" b="0">
-                <a:solidFill>
-                  <a:srgbClr val="D3D9E2"/>
-                </a:solidFill>
-                <a:latin typeface="맑은 고딕"/>
-              </a:rPr>
-              <a:t>4.2</a:t>
-            </a:r>
-          </a:p>
-        </p:txBody>
-      </p:sp>
-      <p:sp>
-        <p:nvSpPr>
-          <p:cNvPr id="25" name="Rectangle 24"/>
+              <a:t>8종 (ISA-101 Level 1~4)</a:t>
+            </a:r>
+          </a:p>
+        </p:txBody>
+      </p:sp>
+      <p:sp>
+        <p:nvSpPr>
+          <p:cNvPr id="23" name="Rectangle 22"/>
           <p:cNvSpPr/>
           <p:nvPr/>
         </p:nvSpPr>
@@ -12599,7 +12521,7 @@
       </p:sp>
       <p:sp>
         <p:nvSpPr>
-          <p:cNvPr id="26" name="Rectangle 25"/>
+          <p:cNvPr id="24" name="Rectangle 23"/>
           <p:cNvSpPr/>
           <p:nvPr/>
         </p:nvSpPr>
@@ -12643,14 +12565,14 @@
       </p:sp>
       <p:sp>
         <p:nvSpPr>
-          <p:cNvPr id="27" name="TextBox 26"/>
+          <p:cNvPr id="25" name="TextBox 24"/>
           <p:cNvSpPr txBox="1"/>
           <p:nvPr/>
         </p:nvSpPr>
         <p:spPr>
           <a:xfrm>
             <a:off x="749808" y="5143500"/>
-            <a:ext cx="5838444" cy="329184"/>
+            <a:ext cx="2247595" cy="329184"/>
           </a:xfrm>
           <a:prstGeom prst="rect">
             <a:avLst/>
@@ -12675,21 +12597,21 @@
                 </a:solidFill>
                 <a:latin typeface="맑은 고딕"/>
               </a:rPr>
-              <a:t>관제 화면 / 미믹 / 트렌드</a:t>
-            </a:r>
-          </a:p>
-        </p:txBody>
-      </p:sp>
-      <p:sp>
-        <p:nvSpPr>
-          <p:cNvPr id="28" name="TextBox 27"/>
-          <p:cNvSpPr txBox="1"/>
-          <p:nvPr/>
-        </p:nvSpPr>
-        <p:spPr>
-          <a:xfrm>
-            <a:off x="6734556" y="5143500"/>
-            <a:ext cx="2574036" cy="329184"/>
+              <a:t>C++ 수집기</a:t>
+            </a:r>
+          </a:p>
+        </p:txBody>
+      </p:sp>
+      <p:sp>
+        <p:nvSpPr>
+          <p:cNvPr id="26" name="TextBox 25"/>
+          <p:cNvSpPr txBox="1"/>
+          <p:nvPr/>
+        </p:nvSpPr>
+        <p:spPr>
+          <a:xfrm>
+            <a:off x="3143707" y="5143500"/>
+            <a:ext cx="8341156" cy="329184"/>
           </a:xfrm>
           <a:prstGeom prst="rect">
             <a:avLst/>
@@ -12714,53 +12636,14 @@
                 </a:solidFill>
                 <a:latin typeface="맑은 고딕"/>
               </a:rPr>
-              <a:t>강도현</a:t>
-            </a:r>
-          </a:p>
-        </p:txBody>
-      </p:sp>
-      <p:sp>
-        <p:nvSpPr>
-          <p:cNvPr id="29" name="TextBox 28"/>
-          <p:cNvSpPr txBox="1"/>
-          <p:nvPr/>
-        </p:nvSpPr>
-        <p:spPr>
-          <a:xfrm>
-            <a:off x="9454896" y="5143500"/>
-            <a:ext cx="2029968" cy="329184"/>
-          </a:xfrm>
-          <a:prstGeom prst="rect">
-            <a:avLst/>
-          </a:prstGeom>
-          <a:noFill/>
-        </p:spPr>
-        <p:txBody>
-          <a:bodyPr wrap="square" lIns="0" rIns="0" tIns="0" bIns="0" anchor="t">
-            <a:spAutoFit/>
-          </a:bodyPr>
-          <a:lstStyle/>
-          <a:p>
-            <a:pPr algn="l">
-              <a:spcAft>
-                <a:spcPts val="0"/>
-              </a:spcAft>
-            </a:pPr>
-            <a:r>
-              <a:rPr sz="1150" b="0">
-                <a:solidFill>
-                  <a:srgbClr val="D3D9E2"/>
-                </a:solidFill>
-                <a:latin typeface="맑은 고딕"/>
-              </a:rPr>
-              <a:t>2.6</a:t>
-            </a:r>
-          </a:p>
-        </p:txBody>
-      </p:sp>
-      <p:sp>
-        <p:nvSpPr>
-          <p:cNvPr id="30" name="Rectangle 29"/>
+              <a:t>12개 파일 — 드라이버 2종, 태그 저장소, 업로더, 설정 파서</a:t>
+            </a:r>
+          </a:p>
+        </p:txBody>
+      </p:sp>
+      <p:sp>
+        <p:nvSpPr>
+          <p:cNvPr id="27" name="Rectangle 26"/>
           <p:cNvSpPr/>
           <p:nvPr/>
         </p:nvSpPr>
@@ -12804,14 +12687,14 @@
       </p:sp>
       <p:sp>
         <p:nvSpPr>
-          <p:cNvPr id="31" name="TextBox 30"/>
+          <p:cNvPr id="28" name="TextBox 27"/>
           <p:cNvSpPr txBox="1"/>
           <p:nvPr/>
         </p:nvSpPr>
         <p:spPr>
           <a:xfrm>
             <a:off x="749808" y="5472684"/>
-            <a:ext cx="5838444" cy="329184"/>
+            <a:ext cx="2247595" cy="329184"/>
           </a:xfrm>
           <a:prstGeom prst="rect">
             <a:avLst/>
@@ -12836,21 +12719,21 @@
                 </a:solidFill>
                 <a:latin typeface="맑은 고딕"/>
               </a:rPr>
-              <a:t>CCTV / 에너지</a:t>
-            </a:r>
-          </a:p>
-        </p:txBody>
-      </p:sp>
-      <p:sp>
-        <p:nvSpPr>
-          <p:cNvPr id="32" name="TextBox 31"/>
-          <p:cNvSpPr txBox="1"/>
-          <p:nvPr/>
-        </p:nvSpPr>
-        <p:spPr>
-          <a:xfrm>
-            <a:off x="6734556" y="5472684"/>
-            <a:ext cx="2574036" cy="329184"/>
+              <a:t>C# 게이트웨이</a:t>
+            </a:r>
+          </a:p>
+        </p:txBody>
+      </p:sp>
+      <p:sp>
+        <p:nvSpPr>
+          <p:cNvPr id="29" name="TextBox 28"/>
+          <p:cNvSpPr txBox="1"/>
+          <p:nvPr/>
+        </p:nvSpPr>
+        <p:spPr>
+          <a:xfrm>
+            <a:off x="3143707" y="5472684"/>
+            <a:ext cx="8341156" cy="329184"/>
           </a:xfrm>
           <a:prstGeom prst="rect">
             <a:avLst/>
@@ -12875,53 +12758,14 @@
                 </a:solidFill>
                 <a:latin typeface="맑은 고딕"/>
               </a:rPr>
-              <a:t>남기훈</a:t>
-            </a:r>
-          </a:p>
-        </p:txBody>
-      </p:sp>
-      <p:sp>
-        <p:nvSpPr>
-          <p:cNvPr id="33" name="TextBox 32"/>
-          <p:cNvSpPr txBox="1"/>
-          <p:nvPr/>
-        </p:nvSpPr>
-        <p:spPr>
-          <a:xfrm>
-            <a:off x="9454896" y="5472684"/>
-            <a:ext cx="2029968" cy="329184"/>
-          </a:xfrm>
-          <a:prstGeom prst="rect">
-            <a:avLst/>
-          </a:prstGeom>
-          <a:noFill/>
-        </p:spPr>
-        <p:txBody>
-          <a:bodyPr wrap="square" lIns="0" rIns="0" tIns="0" bIns="0" anchor="t">
-            <a:spAutoFit/>
-          </a:bodyPr>
-          <a:lstStyle/>
-          <a:p>
-            <a:pPr algn="l">
-              <a:spcAft>
-                <a:spcPts val="0"/>
-              </a:spcAft>
-            </a:pPr>
-            <a:r>
-              <a:rPr sz="1150" b="0">
-                <a:solidFill>
-                  <a:srgbClr val="D3D9E2"/>
-                </a:solidFill>
-                <a:latin typeface="맑은 고딕"/>
-              </a:rPr>
-              <a:t>1.8</a:t>
-            </a:r>
-          </a:p>
-        </p:txBody>
-      </p:sp>
-      <p:sp>
-        <p:nvSpPr>
-          <p:cNvPr id="34" name="Rectangle 33"/>
+              <a:t>Minimal API + SignalR, ISA-18.2 알람 엔진, 히스토리안</a:t>
+            </a:r>
+          </a:p>
+        </p:txBody>
+      </p:sp>
+      <p:sp>
+        <p:nvSpPr>
+          <p:cNvPr id="30" name="Rectangle 29"/>
           <p:cNvSpPr/>
           <p:nvPr/>
         </p:nvSpPr>
@@ -12965,7 +12809,7 @@
       </p:sp>
       <p:sp>
         <p:nvSpPr>
-          <p:cNvPr id="35" name="Rectangle 34"/>
+          <p:cNvPr id="31" name="Rectangle 30"/>
           <p:cNvSpPr/>
           <p:nvPr/>
         </p:nvSpPr>
@@ -13009,14 +12853,14 @@
       </p:sp>
       <p:sp>
         <p:nvSpPr>
-          <p:cNvPr id="36" name="TextBox 35"/>
+          <p:cNvPr id="32" name="TextBox 31"/>
           <p:cNvSpPr txBox="1"/>
           <p:nvPr/>
         </p:nvSpPr>
         <p:spPr>
           <a:xfrm>
             <a:off x="749808" y="5801868"/>
-            <a:ext cx="5838444" cy="329184"/>
+            <a:ext cx="2247595" cy="329184"/>
           </a:xfrm>
           <a:prstGeom prst="rect">
             <a:avLst/>
@@ -13041,21 +12885,21 @@
                 </a:solidFill>
                 <a:latin typeface="맑은 고딕"/>
               </a:rPr>
-              <a:t>안전 도메인 / 검증</a:t>
-            </a:r>
-          </a:p>
-        </p:txBody>
-      </p:sp>
-      <p:sp>
-        <p:nvSpPr>
-          <p:cNvPr id="37" name="TextBox 36"/>
-          <p:cNvSpPr txBox="1"/>
-          <p:nvPr/>
-        </p:nvSpPr>
-        <p:spPr>
-          <a:xfrm>
-            <a:off x="6734556" y="5801868"/>
-            <a:ext cx="2574036" cy="329184"/>
+              <a:t>차트 · 영상</a:t>
+            </a:r>
+          </a:p>
+        </p:txBody>
+      </p:sp>
+      <p:sp>
+        <p:nvSpPr>
+          <p:cNvPr id="33" name="TextBox 32"/>
+          <p:cNvSpPr txBox="1"/>
+          <p:nvPr/>
+        </p:nvSpPr>
+        <p:spPr>
+          <a:xfrm>
+            <a:off x="3143707" y="5801868"/>
+            <a:ext cx="8341156" cy="329184"/>
           </a:xfrm>
           <a:prstGeom prst="rect">
             <a:avLst/>
@@ -13080,53 +12924,14 @@
                 </a:solidFill>
                 <a:latin typeface="맑은 고딕"/>
               </a:rPr>
-              <a:t>조현탁</a:t>
-            </a:r>
-          </a:p>
-        </p:txBody>
-      </p:sp>
-      <p:sp>
-        <p:nvSpPr>
-          <p:cNvPr id="38" name="TextBox 37"/>
-          <p:cNvSpPr txBox="1"/>
-          <p:nvPr/>
-        </p:nvSpPr>
-        <p:spPr>
-          <a:xfrm>
-            <a:off x="9454896" y="5801868"/>
-            <a:ext cx="2029968" cy="329184"/>
-          </a:xfrm>
-          <a:prstGeom prst="rect">
-            <a:avLst/>
-          </a:prstGeom>
-          <a:noFill/>
-        </p:spPr>
-        <p:txBody>
-          <a:bodyPr wrap="square" lIns="0" rIns="0" tIns="0" bIns="0" anchor="t">
-            <a:spAutoFit/>
-          </a:bodyPr>
-          <a:lstStyle/>
-          <a:p>
-            <a:pPr algn="l">
-              <a:spcAft>
-                <a:spcPts val="0"/>
-              </a:spcAft>
-            </a:pPr>
-            <a:r>
-              <a:rPr sz="1150" b="0">
-                <a:solidFill>
-                  <a:srgbClr val="D3D9E2"/>
-                </a:solidFill>
-                <a:latin typeface="맑은 고딕"/>
-              </a:rPr>
-              <a:t>0.9</a:t>
-            </a:r>
-          </a:p>
-        </p:txBody>
-      </p:sp>
-      <p:sp>
-        <p:nvSpPr>
-          <p:cNvPr id="39" name="Rectangle 38"/>
+              <a:t>SVG 차트 5종 + 캔버스 CCTV 뷰어 (자체 구현)</a:t>
+            </a:r>
+          </a:p>
+        </p:txBody>
+      </p:sp>
+      <p:sp>
+        <p:nvSpPr>
+          <p:cNvPr id="34" name="Rectangle 33"/>
           <p:cNvSpPr/>
           <p:nvPr/>
         </p:nvSpPr>
@@ -13170,14 +12975,14 @@
       </p:sp>
       <p:sp>
         <p:nvSpPr>
-          <p:cNvPr id="40" name="TextBox 39"/>
+          <p:cNvPr id="35" name="TextBox 34"/>
           <p:cNvSpPr txBox="1"/>
           <p:nvPr/>
         </p:nvSpPr>
         <p:spPr>
           <a:xfrm>
             <a:off x="749808" y="6131052"/>
-            <a:ext cx="5838444" cy="329184"/>
+            <a:ext cx="2247595" cy="329184"/>
           </a:xfrm>
           <a:prstGeom prst="rect">
             <a:avLst/>
@@ -13202,21 +13007,21 @@
                 </a:solidFill>
                 <a:latin typeface="맑은 고딕"/>
               </a:rPr>
-              <a:t>합계</a:t>
-            </a:r>
-          </a:p>
-        </p:txBody>
-      </p:sp>
-      <p:sp>
-        <p:nvSpPr>
-          <p:cNvPr id="41" name="TextBox 40"/>
-          <p:cNvSpPr txBox="1"/>
-          <p:nvPr/>
-        </p:nvSpPr>
-        <p:spPr>
-          <a:xfrm>
-            <a:off x="6734556" y="6131052"/>
-            <a:ext cx="2574036" cy="329184"/>
+              <a:t>외부 의존성</a:t>
+            </a:r>
+          </a:p>
+        </p:txBody>
+      </p:sp>
+      <p:sp>
+        <p:nvSpPr>
+          <p:cNvPr id="36" name="TextBox 35"/>
+          <p:cNvSpPr txBox="1"/>
+          <p:nvPr/>
+        </p:nvSpPr>
+        <p:spPr>
+          <a:xfrm>
+            <a:off x="3143707" y="6131052"/>
+            <a:ext cx="8341156" cy="329184"/>
           </a:xfrm>
           <a:prstGeom prst="rect">
             <a:avLst/>
@@ -13241,46 +13046,7 @@
                 </a:solidFill>
                 <a:latin typeface="맑은 고딕"/>
               </a:rPr>
-              <a:t>4명</a:t>
-            </a:r>
-          </a:p>
-        </p:txBody>
-      </p:sp>
-      <p:sp>
-        <p:nvSpPr>
-          <p:cNvPr id="42" name="TextBox 41"/>
-          <p:cNvSpPr txBox="1"/>
-          <p:nvPr/>
-        </p:nvSpPr>
-        <p:spPr>
-          <a:xfrm>
-            <a:off x="9454896" y="6131052"/>
-            <a:ext cx="2029968" cy="329184"/>
-          </a:xfrm>
-          <a:prstGeom prst="rect">
-            <a:avLst/>
-          </a:prstGeom>
-          <a:noFill/>
-        </p:spPr>
-        <p:txBody>
-          <a:bodyPr wrap="square" lIns="0" rIns="0" tIns="0" bIns="0" anchor="t">
-            <a:spAutoFit/>
-          </a:bodyPr>
-          <a:lstStyle/>
-          <a:p>
-            <a:pPr algn="l">
-              <a:spcAft>
-                <a:spcPts val="0"/>
-              </a:spcAft>
-            </a:pPr>
-            <a:r>
-              <a:rPr sz="1150" b="0">
-                <a:solidFill>
-                  <a:srgbClr val="35C0D6"/>
-                </a:solidFill>
-                <a:latin typeface="맑은 고딕"/>
-              </a:rPr>
-              <a:t>9.5</a:t>
+              <a:t>없음 — NuGet · npm · CDN 미사용</a:t>
             </a:r>
           </a:p>
         </p:txBody>
@@ -13508,7 +13274,7 @@
                 </a:solidFill>
                 <a:latin typeface="맑은 고딕"/>
               </a:rPr>
-              <a:t>문의 : 제어기술팀 김현우</a:t>
+              <a:t>만든 사람 : 남성흠  ·  프로젝트SH (개인 프로젝트)</a:t>
             </a:r>
           </a:p>
           <a:p>
